--- a/public/fun/cards/care/care-35.pptx
+++ b/public/fun/cards/care/care-35.pptx
@@ -3085,7 +3085,7 @@
     <p:bg>
       <p:bgPr>
         <a:solidFill>
-          <a:srgbClr val="F9F1F5"/>
+          <a:srgbClr val="FFFFFF"/>
         </a:solidFill>
         <a:effectLst/>
       </p:bgPr>
@@ -3099,49 +3099,41 @@
       <p:grpSpPr/>
       <p:sp>
         <p:nvSpPr>
-          <p:cNvPr id="2" name="Oval 1"/>
+          <p:cNvPr id="2" name="Freeform 1"/>
           <p:cNvSpPr/>
           <p:nvPr/>
         </p:nvSpPr>
         <p:spPr>
           <a:xfrm>
-            <a:off x="187200" y="403200"/>
-            <a:ext cx="993600" cy="993600"/>
+            <a:off x="2016000" y="0"/>
+            <a:ext cx="1224000" cy="1800000"/>
           </a:xfrm>
-          <a:prstGeom prst="ellipse">
+          <a:custGeom>
             <a:avLst/>
-          </a:prstGeom>
-          <a:noFill/>
-          <a:ln w="14400">
-            <a:solidFill>
-              <a:srgbClr val="F3E0E9"/>
-            </a:solidFill>
-          </a:ln>
-        </p:spPr>
-        <p:txBody>
-          <a:bodyPr rtlCol="0" anchor="ctr"/>
-          <a:lstStyle/>
-          <a:p>
-            <a:pPr algn="ctr"/>
-          </a:p>
-        </p:txBody>
-      </p:sp>
-      <p:sp>
-        <p:nvSpPr>
-          <p:cNvPr id="3" name="Oval 2"/>
-          <p:cNvSpPr/>
-          <p:nvPr/>
-        </p:nvSpPr>
-        <p:spPr>
-          <a:xfrm>
-            <a:off x="259200" y="475200"/>
-            <a:ext cx="849600" cy="849600"/>
-          </a:xfrm>
-          <a:prstGeom prst="ellipse">
-            <a:avLst/>
-          </a:prstGeom>
+            <a:gdLst/>
+            <a:ahLst/>
+            <a:cxnLst/>
+            <a:rect l="l" t="t" r="r" b="b"/>
+            <a:pathLst>
+              <a:path w="1224000" h="1800000">
+                <a:moveTo>
+                  <a:pt x="360000" y="0"/>
+                </a:moveTo>
+                <a:lnTo>
+                  <a:pt x="1224000" y="0"/>
+                </a:lnTo>
+                <a:lnTo>
+                  <a:pt x="1224000" y="1800000"/>
+                </a:lnTo>
+                <a:lnTo>
+                  <a:pt x="0" y="1800000"/>
+                </a:lnTo>
+                <a:close/>
+              </a:path>
+            </a:pathLst>
+          </a:custGeom>
           <a:solidFill>
-            <a:srgbClr val="B8618C"/>
+            <a:srgbClr val="C93CE0"/>
           </a:solidFill>
           <a:ln>
             <a:noFill/>
@@ -3157,14 +3149,64 @@
       </p:sp>
       <p:sp>
         <p:nvSpPr>
+          <p:cNvPr id="3" name="Freeform 2"/>
+          <p:cNvSpPr/>
+          <p:nvPr/>
+        </p:nvSpPr>
+        <p:spPr>
+          <a:xfrm>
+            <a:off x="1864800" y="0"/>
+            <a:ext cx="460800" cy="1800000"/>
+          </a:xfrm>
+          <a:custGeom>
+            <a:avLst/>
+            <a:gdLst/>
+            <a:ahLst/>
+            <a:cxnLst/>
+            <a:rect l="l" t="t" r="r" b="b"/>
+            <a:pathLst>
+              <a:path w="460800" h="1800000">
+                <a:moveTo>
+                  <a:pt x="360000" y="0"/>
+                </a:moveTo>
+                <a:lnTo>
+                  <a:pt x="460800" y="0"/>
+                </a:lnTo>
+                <a:lnTo>
+                  <a:pt x="100800" y="1800000"/>
+                </a:lnTo>
+                <a:lnTo>
+                  <a:pt x="0" y="1800000"/>
+                </a:lnTo>
+                <a:close/>
+              </a:path>
+            </a:pathLst>
+          </a:custGeom>
+          <a:solidFill>
+            <a:srgbClr val="F7E4FB"/>
+          </a:solidFill>
+          <a:ln>
+            <a:noFill/>
+          </a:ln>
+        </p:spPr>
+        <p:txBody>
+          <a:bodyPr rtlCol="0" anchor="ctr"/>
+          <a:lstStyle/>
+          <a:p>
+            <a:pPr algn="ctr"/>
+          </a:p>
+        </p:txBody>
+      </p:sp>
+      <p:sp>
+        <p:nvSpPr>
           <p:cNvPr id="4" name="텍스트"/>
           <p:cNvSpPr txBox="1"/>
           <p:nvPr/>
         </p:nvSpPr>
         <p:spPr>
           <a:xfrm>
-            <a:off x="259200" y="612000"/>
-            <a:ext cx="849600" cy="576000"/>
+            <a:off x="252000" y="223200"/>
+            <a:ext cx="1440000" cy="133351"/>
           </a:xfrm>
           <a:prstGeom prst="rect">
             <a:avLst/>
@@ -3172,25 +3214,25 @@
           <a:noFill/>
         </p:spPr>
         <p:txBody>
-          <a:bodyPr wrap="square" lIns="0" rIns="0" tIns="0" bIns="0" anchor="ctr">
+          <a:bodyPr wrap="square" lIns="0" rIns="0" tIns="0" bIns="0" anchor="t">
             <a:spAutoFit/>
           </a:bodyPr>
           <a:lstStyle/>
           <a:p>
-            <a:pPr algn="ctr">
+            <a:pPr algn="l">
               <a:lnSpc>
-                <a:spcPts val="6959"/>
+                <a:spcPts val="1015"/>
               </a:lnSpc>
             </a:pPr>
             <a:r>
-              <a:rPr sz="4800" b="1">
+              <a:rPr sz="700" b="1" spc="200">
                 <a:solidFill>
-                  <a:srgbClr val="FFFFFF"/>
+                  <a:srgbClr val="6B7280"/>
                 </a:solidFill>
                 <a:latin typeface="맑은 고딕"/>
                 <a:ea typeface="맑은 고딕"/>
               </a:rPr>
-              <a:t>탁</a:t>
+              <a:t>의원 · 약국 이름</a:t>
             </a:r>
           </a:p>
         </p:txBody>
@@ -3203,8 +3245,8 @@
         </p:nvSpPr>
         <p:spPr>
           <a:xfrm>
-            <a:off x="1332000" y="223200"/>
-            <a:ext cx="1728000" cy="100800"/>
+            <a:off x="252000" y="540000"/>
+            <a:ext cx="1584000" cy="360000"/>
           </a:xfrm>
           <a:prstGeom prst="rect">
             <a:avLst/>
@@ -3219,18 +3261,18 @@
           <a:p>
             <a:pPr algn="l">
               <a:lnSpc>
-                <a:spcPts val="1087"/>
+                <a:spcPts val="3190"/>
               </a:lnSpc>
             </a:pPr>
             <a:r>
-              <a:rPr sz="750" b="1" spc="150">
+              <a:rPr sz="2200" b="1">
                 <a:solidFill>
-                  <a:srgbClr val="866073"/>
+                  <a:srgbClr val="12151C"/>
                 </a:solidFill>
                 <a:latin typeface="맑은 고딕"/>
                 <a:ea typeface="맑은 고딕"/>
               </a:rPr>
-              <a:t>의원 · 약국 이름</a:t>
+              <a:t>탁서아</a:t>
             </a:r>
           </a:p>
         </p:txBody>
@@ -3243,8 +3285,8 @@
         </p:nvSpPr>
         <p:spPr>
           <a:xfrm>
-            <a:off x="1332000" y="424800"/>
-            <a:ext cx="1728000" cy="297182"/>
+            <a:off x="252000" y="943200"/>
+            <a:ext cx="1584000" cy="171451"/>
           </a:xfrm>
           <a:prstGeom prst="rect">
             <a:avLst/>
@@ -3259,32 +3301,61 @@
           <a:p>
             <a:pPr algn="l">
               <a:lnSpc>
-                <a:spcPts val="2610"/>
+                <a:spcPts val="1305"/>
               </a:lnSpc>
             </a:pPr>
             <a:r>
-              <a:rPr sz="1800" b="1" spc="50">
+              <a:rPr sz="900" b="0">
                 <a:solidFill>
-                  <a:srgbClr val="7B3759"/>
+                  <a:srgbClr val="6B7280"/>
                 </a:solidFill>
                 <a:latin typeface="맑은 고딕"/>
                 <a:ea typeface="맑은 고딕"/>
               </a:rPr>
-              <a:t>탁서아</a:t>
-            </a:r>
-          </a:p>
-        </p:txBody>
-      </p:sp>
-      <p:sp>
-        <p:nvSpPr>
-          <p:cNvPr id="7" name="텍스트"/>
+              <a:t>한의사</a:t>
+            </a:r>
+          </a:p>
+        </p:txBody>
+      </p:sp>
+      <p:sp>
+        <p:nvSpPr>
+          <p:cNvPr id="7" name="Rectangle 6"/>
+          <p:cNvSpPr/>
+          <p:nvPr/>
+        </p:nvSpPr>
+        <p:spPr>
+          <a:xfrm>
+            <a:off x="252000" y="1195200"/>
+            <a:ext cx="144000" cy="18000"/>
+          </a:xfrm>
+          <a:prstGeom prst="rect">
+            <a:avLst/>
+          </a:prstGeom>
+          <a:solidFill>
+            <a:srgbClr val="C93CE0"/>
+          </a:solidFill>
+          <a:ln>
+            <a:noFill/>
+          </a:ln>
+        </p:spPr>
+        <p:txBody>
+          <a:bodyPr rtlCol="0" anchor="ctr"/>
+          <a:lstStyle/>
+          <a:p>
+            <a:pPr algn="ctr"/>
+          </a:p>
+        </p:txBody>
+      </p:sp>
+      <p:sp>
+        <p:nvSpPr>
+          <p:cNvPr id="8" name="텍스트"/>
           <p:cNvSpPr txBox="1"/>
           <p:nvPr/>
         </p:nvSpPr>
         <p:spPr>
           <a:xfrm>
-            <a:off x="1332000" y="705600"/>
-            <a:ext cx="1728000" cy="122400"/>
+            <a:off x="252000" y="1328400"/>
+            <a:ext cx="331200" cy="99061"/>
           </a:xfrm>
           <a:prstGeom prst="rect">
             <a:avLst/>
@@ -3299,48 +3370,19 @@
           <a:p>
             <a:pPr algn="l">
               <a:lnSpc>
-                <a:spcPts val="1232"/>
+                <a:spcPts val="754"/>
               </a:lnSpc>
             </a:pPr>
             <a:r>
-              <a:rPr sz="850" b="1">
+              <a:rPr sz="520" b="1" spc="120">
                 <a:solidFill>
-                  <a:srgbClr val="9C5277"/>
+                  <a:srgbClr val="6B7280"/>
                 </a:solidFill>
                 <a:latin typeface="맑은 고딕"/>
                 <a:ea typeface="맑은 고딕"/>
               </a:rPr>
-              <a:t>한의사</a:t>
-            </a:r>
-          </a:p>
-        </p:txBody>
-      </p:sp>
-      <p:sp>
-        <p:nvSpPr>
-          <p:cNvPr id="8" name="Rectangle 7"/>
-          <p:cNvSpPr/>
-          <p:nvPr/>
-        </p:nvSpPr>
-        <p:spPr>
-          <a:xfrm>
-            <a:off x="1332000" y="907200"/>
-            <a:ext cx="201600" cy="14400"/>
-          </a:xfrm>
-          <a:prstGeom prst="rect">
-            <a:avLst/>
-          </a:prstGeom>
-          <a:solidFill>
-            <a:srgbClr val="B8618C"/>
-          </a:solidFill>
-          <a:ln>
-            <a:noFill/>
-          </a:ln>
-        </p:spPr>
-        <p:txBody>
-          <a:bodyPr rtlCol="0" anchor="ctr"/>
-          <a:lstStyle/>
-          <a:p>
-            <a:pPr algn="ctr"/>
+              <a:t>TEL</a:t>
+            </a:r>
           </a:p>
         </p:txBody>
       </p:sp>
@@ -3352,8 +3394,8 @@
         </p:nvSpPr>
         <p:spPr>
           <a:xfrm>
-            <a:off x="1332000" y="1051200"/>
-            <a:ext cx="122400" cy="168911"/>
+            <a:off x="583200" y="1317600"/>
+            <a:ext cx="1188000" cy="125731"/>
           </a:xfrm>
           <a:prstGeom prst="rect">
             <a:avLst/>
@@ -3368,18 +3410,18 @@
           <a:p>
             <a:pPr algn="l">
               <a:lnSpc>
-                <a:spcPts val="1015"/>
+                <a:spcPts val="956"/>
               </a:lnSpc>
             </a:pPr>
             <a:r>
-              <a:rPr sz="700" b="1">
+              <a:rPr sz="660" b="0">
                 <a:solidFill>
-                  <a:srgbClr val="9C5277"/>
+                  <a:srgbClr val="12151C"/>
                 </a:solidFill>
                 <a:latin typeface="맑은 고딕"/>
                 <a:ea typeface="맑은 고딕"/>
               </a:rPr>
-              <a:t>T</a:t>
+              <a:t>010-1234-5678</a:t>
             </a:r>
           </a:p>
         </p:txBody>
@@ -3392,8 +3434,8 @@
         </p:nvSpPr>
         <p:spPr>
           <a:xfrm>
-            <a:off x="1476000" y="1051200"/>
-            <a:ext cx="1584000" cy="168911"/>
+            <a:off x="252000" y="1458000"/>
+            <a:ext cx="331200" cy="99061"/>
           </a:xfrm>
           <a:prstGeom prst="rect">
             <a:avLst/>
@@ -3408,18 +3450,18 @@
           <a:p>
             <a:pPr algn="l">
               <a:lnSpc>
-                <a:spcPts val="1015"/>
+                <a:spcPts val="754"/>
               </a:lnSpc>
             </a:pPr>
             <a:r>
-              <a:rPr sz="700" b="0">
+              <a:rPr sz="520" b="1" spc="120">
                 <a:solidFill>
-                  <a:srgbClr val="7B3759"/>
+                  <a:srgbClr val="6B7280"/>
                 </a:solidFill>
                 <a:latin typeface="맑은 고딕"/>
                 <a:ea typeface="맑은 고딕"/>
               </a:rPr>
-              <a:t>010-1234-5678</a:t>
+              <a:t>MAIL</a:t>
             </a:r>
           </a:p>
         </p:txBody>
@@ -3432,8 +3474,8 @@
         </p:nvSpPr>
         <p:spPr>
           <a:xfrm>
-            <a:off x="1332000" y="1220111"/>
-            <a:ext cx="122400" cy="168911"/>
+            <a:off x="583200" y="1447200"/>
+            <a:ext cx="1188000" cy="125731"/>
           </a:xfrm>
           <a:prstGeom prst="rect">
             <a:avLst/>
@@ -3448,18 +3490,18 @@
           <a:p>
             <a:pPr algn="l">
               <a:lnSpc>
-                <a:spcPts val="1015"/>
+                <a:spcPts val="956"/>
               </a:lnSpc>
             </a:pPr>
             <a:r>
-              <a:rPr sz="700" b="1">
+              <a:rPr sz="660" b="0">
                 <a:solidFill>
-                  <a:srgbClr val="9C5277"/>
+                  <a:srgbClr val="12151C"/>
                 </a:solidFill>
                 <a:latin typeface="맑은 고딕"/>
                 <a:ea typeface="맑은 고딕"/>
               </a:rPr>
-              <a:t>E</a:t>
+              <a:t>name@example.com</a:t>
             </a:r>
           </a:p>
         </p:txBody>
@@ -3472,8 +3514,8 @@
         </p:nvSpPr>
         <p:spPr>
           <a:xfrm>
-            <a:off x="1476000" y="1220111"/>
-            <a:ext cx="1584000" cy="168911"/>
+            <a:off x="252000" y="1587600"/>
+            <a:ext cx="331200" cy="99061"/>
           </a:xfrm>
           <a:prstGeom prst="rect">
             <a:avLst/>
@@ -3488,18 +3530,18 @@
           <a:p>
             <a:pPr algn="l">
               <a:lnSpc>
-                <a:spcPts val="1015"/>
+                <a:spcPts val="754"/>
               </a:lnSpc>
             </a:pPr>
             <a:r>
-              <a:rPr sz="700" b="0">
+              <a:rPr sz="520" b="1" spc="120">
                 <a:solidFill>
-                  <a:srgbClr val="7B3759"/>
+                  <a:srgbClr val="6B7280"/>
                 </a:solidFill>
                 <a:latin typeface="맑은 고딕"/>
                 <a:ea typeface="맑은 고딕"/>
               </a:rPr>
-              <a:t>name@example.com</a:t>
+              <a:t>ADDR</a:t>
             </a:r>
           </a:p>
         </p:txBody>
@@ -3512,8 +3554,8 @@
         </p:nvSpPr>
         <p:spPr>
           <a:xfrm>
-            <a:off x="1332000" y="1389022"/>
-            <a:ext cx="122400" cy="168911"/>
+            <a:off x="583200" y="1576800"/>
+            <a:ext cx="1188000" cy="125731"/>
           </a:xfrm>
           <a:prstGeom prst="rect">
             <a:avLst/>
@@ -3528,53 +3570,13 @@
           <a:p>
             <a:pPr algn="l">
               <a:lnSpc>
-                <a:spcPts val="1015"/>
+                <a:spcPts val="956"/>
               </a:lnSpc>
             </a:pPr>
             <a:r>
-              <a:rPr sz="700" b="1">
+              <a:rPr sz="660" b="0">
                 <a:solidFill>
-                  <a:srgbClr val="9C5277"/>
-                </a:solidFill>
-                <a:latin typeface="맑은 고딕"/>
-                <a:ea typeface="맑은 고딕"/>
-              </a:rPr>
-              <a:t>A</a:t>
-            </a:r>
-          </a:p>
-        </p:txBody>
-      </p:sp>
-      <p:sp>
-        <p:nvSpPr>
-          <p:cNvPr id="14" name="텍스트"/>
-          <p:cNvSpPr txBox="1"/>
-          <p:nvPr/>
-        </p:nvSpPr>
-        <p:spPr>
-          <a:xfrm>
-            <a:off x="1476000" y="1389022"/>
-            <a:ext cx="1584000" cy="168911"/>
-          </a:xfrm>
-          <a:prstGeom prst="rect">
-            <a:avLst/>
-          </a:prstGeom>
-          <a:noFill/>
-        </p:spPr>
-        <p:txBody>
-          <a:bodyPr wrap="square" lIns="0" rIns="0" tIns="0" bIns="0" anchor="t">
-            <a:spAutoFit/>
-          </a:bodyPr>
-          <a:lstStyle/>
-          <a:p>
-            <a:pPr algn="l">
-              <a:lnSpc>
-                <a:spcPts val="1015"/>
-              </a:lnSpc>
-            </a:pPr>
-            <a:r>
-              <a:rPr sz="700" b="0">
-                <a:solidFill>
-                  <a:srgbClr val="7B3759"/>
+                  <a:srgbClr val="12151C"/>
                 </a:solidFill>
                 <a:latin typeface="맑은 고딕"/>
                 <a:ea typeface="맑은 고딕"/>
@@ -3598,7 +3600,7 @@
     <p:bg>
       <p:bgPr>
         <a:solidFill>
-          <a:srgbClr val="7B3759"/>
+          <a:srgbClr val="0E1116"/>
         </a:solidFill>
         <a:effectLst/>
       </p:bgPr>
@@ -3612,20 +3614,60 @@
       <p:grpSpPr/>
       <p:sp>
         <p:nvSpPr>
-          <p:cNvPr id="2" name="Rectangle 1"/>
+          <p:cNvPr id="2" name="텍스트"/>
+          <p:cNvSpPr txBox="1"/>
+          <p:nvPr/>
+        </p:nvSpPr>
+        <p:spPr>
+          <a:xfrm>
+            <a:off x="252000" y="324000"/>
+            <a:ext cx="2520000" cy="792000"/>
+          </a:xfrm>
+          <a:prstGeom prst="rect">
+            <a:avLst/>
+          </a:prstGeom>
+          <a:noFill/>
+        </p:spPr>
+        <p:txBody>
+          <a:bodyPr wrap="square" lIns="0" rIns="0" tIns="0" bIns="0" anchor="t">
+            <a:spAutoFit/>
+          </a:bodyPr>
+          <a:lstStyle/>
+          <a:p>
+            <a:pPr algn="l">
+              <a:lnSpc>
+                <a:spcPts val="1884"/>
+              </a:lnSpc>
+            </a:pPr>
+            <a:r>
+              <a:rPr sz="1300" b="1">
+                <a:solidFill>
+                  <a:srgbClr val="FFFFFF"/>
+                </a:solidFill>
+                <a:latin typeface="맑은 고딕"/>
+                <a:ea typeface="맑은 고딕"/>
+              </a:rPr>
+              <a:t>병원 문턱을 낮추겠습니다</a:t>
+            </a:r>
+          </a:p>
+        </p:txBody>
+      </p:sp>
+      <p:sp>
+        <p:nvSpPr>
+          <p:cNvPr id="3" name="Rectangle 2"/>
           <p:cNvSpPr/>
           <p:nvPr/>
         </p:nvSpPr>
         <p:spPr>
           <a:xfrm>
-            <a:off x="0" y="0"/>
-            <a:ext cx="1224000" cy="1800000"/>
+            <a:off x="0" y="1476000"/>
+            <a:ext cx="3240000" cy="324000"/>
           </a:xfrm>
           <a:prstGeom prst="rect">
             <a:avLst/>
           </a:prstGeom>
           <a:solidFill>
-            <a:srgbClr val="CC8DAC"/>
+            <a:srgbClr val="C93CE0"/>
           </a:solidFill>
           <a:ln>
             <a:noFill/>
@@ -3641,45 +3683,58 @@
       </p:sp>
       <p:sp>
         <p:nvSpPr>
-          <p:cNvPr id="3" name="Freeform 2"/>
+          <p:cNvPr id="4" name="텍스트"/>
+          <p:cNvSpPr txBox="1"/>
+          <p:nvPr/>
+        </p:nvSpPr>
+        <p:spPr>
+          <a:xfrm>
+            <a:off x="252000" y="1569600"/>
+            <a:ext cx="1872000" cy="142876"/>
+          </a:xfrm>
+          <a:prstGeom prst="rect">
+            <a:avLst/>
+          </a:prstGeom>
+          <a:noFill/>
+        </p:spPr>
+        <p:txBody>
+          <a:bodyPr wrap="square" lIns="0" rIns="0" tIns="0" bIns="0" anchor="t">
+            <a:spAutoFit/>
+          </a:bodyPr>
+          <a:lstStyle/>
+          <a:p>
+            <a:pPr algn="l">
+              <a:lnSpc>
+                <a:spcPts val="1087"/>
+              </a:lnSpc>
+            </a:pPr>
+            <a:r>
+              <a:rPr sz="750" b="1" spc="200">
+                <a:solidFill>
+                  <a:srgbClr val="FFFFFF"/>
+                </a:solidFill>
+                <a:latin typeface="맑은 고딕"/>
+                <a:ea typeface="맑은 고딕"/>
+              </a:rPr>
+              <a:t>의원 · 약국 이름</a:t>
+            </a:r>
+          </a:p>
+        </p:txBody>
+      </p:sp>
+      <p:sp>
+        <p:nvSpPr>
+          <p:cNvPr id="5" name="Oval 4"/>
           <p:cNvSpPr/>
           <p:nvPr/>
         </p:nvSpPr>
         <p:spPr>
           <a:xfrm>
-            <a:off x="428400" y="651600"/>
-            <a:ext cx="367200" cy="486000"/>
+            <a:off x="2714400" y="1616400"/>
+            <a:ext cx="43200" cy="43200"/>
           </a:xfrm>
-          <a:custGeom>
+          <a:prstGeom prst="ellipse">
             <a:avLst/>
-            <a:gdLst/>
-            <a:ahLst/>
-            <a:cxnLst/>
-            <a:rect l="l" t="t" r="r" b="b"/>
-            <a:pathLst>
-              <a:path w="367200" h="486000">
-                <a:moveTo>
-                  <a:pt x="0" y="54000"/>
-                </a:moveTo>
-                <a:lnTo>
-                  <a:pt x="183600" y="0"/>
-                </a:lnTo>
-                <a:lnTo>
-                  <a:pt x="367200" y="54000"/>
-                </a:lnTo>
-                <a:lnTo>
-                  <a:pt x="367200" y="259200"/>
-                </a:lnTo>
-                <a:lnTo>
-                  <a:pt x="183600" y="486000"/>
-                </a:lnTo>
-                <a:lnTo>
-                  <a:pt x="0" y="259200"/>
-                </a:lnTo>
-                <a:close/>
-              </a:path>
-            </a:pathLst>
-          </a:custGeom>
+          </a:prstGeom>
           <a:solidFill>
             <a:srgbClr val="FFFFFF"/>
           </a:solidFill>
@@ -3695,121 +3750,24 @@
           </a:p>
         </p:txBody>
       </p:sp>
-      <p:cxnSp>
-        <p:nvCxnSpPr>
-          <p:cNvPr id="4" name="Connector 3"/>
-          <p:cNvCxnSpPr/>
+      <p:sp>
+        <p:nvSpPr>
+          <p:cNvPr id="6" name="Oval 5"/>
+          <p:cNvSpPr/>
           <p:nvPr/>
-        </p:nvCxnSpPr>
+        </p:nvSpPr>
         <p:spPr>
           <a:xfrm>
-            <a:off x="536400" y="900000"/>
-            <a:ext cx="59400" cy="64800"/>
+            <a:off x="2822400" y="1616400"/>
+            <a:ext cx="43200" cy="43200"/>
           </a:xfrm>
-          <a:prstGeom prst="line">
-            <a:avLst/>
-          </a:prstGeom>
-          <a:ln w="37800">
-            <a:solidFill>
-              <a:srgbClr val="FFFFFF"/>
-            </a:solidFill>
-          </a:ln>
-        </p:spPr>
-      </p:cxnSp>
-      <p:cxnSp>
-        <p:nvCxnSpPr>
-          <p:cNvPr id="5" name="Connector 4"/>
-          <p:cNvCxnSpPr/>
-          <p:nvPr/>
-        </p:nvCxnSpPr>
-        <p:spPr>
-          <a:xfrm flipV="1">
-            <a:off x="595800" y="835200"/>
-            <a:ext cx="102600" cy="129600"/>
-          </a:xfrm>
-          <a:prstGeom prst="line">
-            <a:avLst/>
-          </a:prstGeom>
-          <a:ln w="37800">
-            <a:solidFill>
-              <a:srgbClr val="FFFFFF"/>
-            </a:solidFill>
-          </a:ln>
-        </p:spPr>
-      </p:cxnSp>
-      <p:sp>
-        <p:nvSpPr>
-          <p:cNvPr id="6" name="텍스트"/>
-          <p:cNvSpPr txBox="1"/>
-          <p:nvPr/>
-        </p:nvSpPr>
-        <p:spPr>
-          <a:xfrm>
-            <a:off x="1440000" y="432000"/>
-            <a:ext cx="1584000" cy="792000"/>
-          </a:xfrm>
-          <a:prstGeom prst="rect">
-            <a:avLst/>
-          </a:prstGeom>
-          <a:noFill/>
-        </p:spPr>
-        <p:txBody>
-          <a:bodyPr wrap="square" lIns="0" rIns="0" tIns="0" bIns="0" anchor="ctr">
-            <a:spAutoFit/>
-          </a:bodyPr>
-          <a:lstStyle/>
-          <a:p>
-            <a:pPr algn="l">
-              <a:lnSpc>
-                <a:spcPts val="1667"/>
-              </a:lnSpc>
-            </a:pPr>
-            <a:r>
-              <a:rPr sz="1150" b="1">
-                <a:solidFill>
-                  <a:srgbClr val="FFFFFF"/>
-                </a:solidFill>
-                <a:latin typeface="바탕"/>
-                <a:ea typeface="바탕"/>
-              </a:rPr>
-              <a:t>병원 문턱을</a:t>
-            </a:r>
-          </a:p>
-          <a:p>
-            <a:pPr algn="l">
-              <a:lnSpc>
-                <a:spcPts val="1667"/>
-              </a:lnSpc>
-            </a:pPr>
-            <a:r>
-              <a:rPr sz="1150" b="1">
-                <a:solidFill>
-                  <a:srgbClr val="FFFFFF"/>
-                </a:solidFill>
-                <a:latin typeface="바탕"/>
-                <a:ea typeface="바탕"/>
-              </a:rPr>
-              <a:t>낮추겠습니다</a:t>
-            </a:r>
-          </a:p>
-        </p:txBody>
-      </p:sp>
-      <p:sp>
-        <p:nvSpPr>
-          <p:cNvPr id="7" name="Rectangle 6"/>
-          <p:cNvSpPr/>
-          <p:nvPr/>
-        </p:nvSpPr>
-        <p:spPr>
-          <a:xfrm>
-            <a:off x="1440000" y="1317600"/>
-            <a:ext cx="180000" cy="10800"/>
-          </a:xfrm>
-          <a:prstGeom prst="rect">
+          <a:prstGeom prst="ellipse">
             <a:avLst/>
           </a:prstGeom>
           <a:solidFill>
-            <a:srgbClr val="CC8DAC"/>
+            <a:srgbClr val="FFFFFF">
+              <a:alpha val="50000"/>
+            </a:srgbClr>
           </a:solidFill>
           <a:ln>
             <a:noFill/>
@@ -3825,41 +3783,32 @@
       </p:sp>
       <p:sp>
         <p:nvSpPr>
-          <p:cNvPr id="8" name="텍스트"/>
-          <p:cNvSpPr txBox="1"/>
+          <p:cNvPr id="7" name="Oval 6"/>
+          <p:cNvSpPr/>
           <p:nvPr/>
         </p:nvSpPr>
         <p:spPr>
           <a:xfrm>
-            <a:off x="1440000" y="1418400"/>
-            <a:ext cx="1584000" cy="108000"/>
+            <a:off x="2930400" y="1616400"/>
+            <a:ext cx="43200" cy="43200"/>
           </a:xfrm>
-          <a:prstGeom prst="rect">
+          <a:prstGeom prst="ellipse">
             <a:avLst/>
           </a:prstGeom>
-          <a:noFill/>
+          <a:solidFill>
+            <a:srgbClr val="FFFFFF">
+              <a:alpha val="50000"/>
+            </a:srgbClr>
+          </a:solidFill>
+          <a:ln>
+            <a:noFill/>
+          </a:ln>
         </p:spPr>
         <p:txBody>
-          <a:bodyPr wrap="square" lIns="0" rIns="0" tIns="0" bIns="0" anchor="t">
-            <a:spAutoFit/>
-          </a:bodyPr>
-          <a:lstStyle/>
-          <a:p>
-            <a:pPr algn="l">
-              <a:lnSpc>
-                <a:spcPts val="1087"/>
-              </a:lnSpc>
-            </a:pPr>
-            <a:r>
-              <a:rPr sz="750" b="1" spc="200">
-                <a:solidFill>
-                  <a:srgbClr val="D1B9C5"/>
-                </a:solidFill>
-                <a:latin typeface="맑은 고딕"/>
-                <a:ea typeface="맑은 고딕"/>
-              </a:rPr>
-              <a:t>의원 · 약국 이름</a:t>
-            </a:r>
+          <a:bodyPr rtlCol="0" anchor="ctr"/>
+          <a:lstStyle/>
+          <a:p>
+            <a:pPr algn="ctr"/>
           </a:p>
         </p:txBody>
       </p:sp>

--- a/public/fun/cards/care/care-35.pptx
+++ b/public/fun/cards/care/care-35.pptx
@@ -3105,8 +3105,8 @@
         </p:nvSpPr>
         <p:spPr>
           <a:xfrm>
-            <a:off x="2016000" y="0"/>
-            <a:ext cx="1224000" cy="1800000"/>
+            <a:off x="2124000" y="0"/>
+            <a:ext cx="1116000" cy="1800000"/>
           </a:xfrm>
           <a:custGeom>
             <a:avLst/>
@@ -3115,15 +3115,15 @@
             <a:cxnLst/>
             <a:rect l="l" t="t" r="r" b="b"/>
             <a:pathLst>
-              <a:path w="1224000" h="1800000">
+              <a:path w="1116000" h="1800000">
                 <a:moveTo>
                   <a:pt x="360000" y="0"/>
                 </a:moveTo>
                 <a:lnTo>
-                  <a:pt x="1224000" y="0"/>
+                  <a:pt x="1116000" y="0"/>
                 </a:lnTo>
                 <a:lnTo>
-                  <a:pt x="1224000" y="1800000"/>
+                  <a:pt x="1116000" y="1800000"/>
                 </a:lnTo>
                 <a:lnTo>
                   <a:pt x="0" y="1800000"/>
@@ -3147,66 +3147,79 @@
           </a:p>
         </p:txBody>
       </p:sp>
-      <p:sp>
-        <p:nvSpPr>
-          <p:cNvPr id="3" name="Freeform 2"/>
-          <p:cNvSpPr/>
+      <p:cxnSp>
+        <p:nvCxnSpPr>
+          <p:cNvPr id="3" name="Connector 2"/>
+          <p:cNvCxnSpPr/>
           <p:nvPr/>
-        </p:nvSpPr>
-        <p:spPr>
-          <a:xfrm>
-            <a:off x="1864800" y="0"/>
-            <a:ext cx="460800" cy="1800000"/>
-          </a:xfrm>
-          <a:custGeom>
+        </p:nvCxnSpPr>
+        <p:spPr>
+          <a:xfrm flipH="1">
+            <a:off x="2044800" y="0"/>
+            <a:ext cx="360000" cy="1800000"/>
+          </a:xfrm>
+          <a:prstGeom prst="line">
             <a:avLst/>
-            <a:gdLst/>
-            <a:ahLst/>
-            <a:cxnLst/>
-            <a:rect l="l" t="t" r="r" b="b"/>
-            <a:pathLst>
-              <a:path w="460800" h="1800000">
-                <a:moveTo>
-                  <a:pt x="360000" y="0"/>
-                </a:moveTo>
-                <a:lnTo>
-                  <a:pt x="460800" y="0"/>
-                </a:lnTo>
-                <a:lnTo>
-                  <a:pt x="100800" y="1800000"/>
-                </a:lnTo>
-                <a:lnTo>
-                  <a:pt x="0" y="1800000"/>
-                </a:lnTo>
-                <a:close/>
-              </a:path>
-            </a:pathLst>
-          </a:custGeom>
-          <a:solidFill>
-            <a:srgbClr val="F7E4FB"/>
-          </a:solidFill>
-          <a:ln>
-            <a:noFill/>
+          </a:prstGeom>
+          <a:ln w="3600">
+            <a:solidFill>
+              <a:srgbClr val="F7E4FB"/>
+            </a:solidFill>
           </a:ln>
         </p:spPr>
-        <p:txBody>
-          <a:bodyPr rtlCol="0" anchor="ctr"/>
-          <a:lstStyle/>
-          <a:p>
-            <a:pPr algn="ctr"/>
-          </a:p>
-        </p:txBody>
-      </p:sp>
-      <p:sp>
-        <p:nvSpPr>
-          <p:cNvPr id="4" name="텍스트"/>
+      </p:cxnSp>
+      <p:cxnSp>
+        <p:nvCxnSpPr>
+          <p:cNvPr id="4" name="Connector 3"/>
+          <p:cNvCxnSpPr/>
+          <p:nvPr/>
+        </p:nvCxnSpPr>
+        <p:spPr>
+          <a:xfrm flipH="1">
+            <a:off x="1965600" y="0"/>
+            <a:ext cx="360000" cy="1800000"/>
+          </a:xfrm>
+          <a:prstGeom prst="line">
+            <a:avLst/>
+          </a:prstGeom>
+          <a:ln w="3600">
+            <a:solidFill>
+              <a:srgbClr val="F7E4FB"/>
+            </a:solidFill>
+          </a:ln>
+        </p:spPr>
+      </p:cxnSp>
+      <p:cxnSp>
+        <p:nvCxnSpPr>
+          <p:cNvPr id="5" name="Connector 4"/>
+          <p:cNvCxnSpPr/>
+          <p:nvPr/>
+        </p:nvCxnSpPr>
+        <p:spPr>
+          <a:xfrm flipH="1">
+            <a:off x="1886400" y="0"/>
+            <a:ext cx="360000" cy="1800000"/>
+          </a:xfrm>
+          <a:prstGeom prst="line">
+            <a:avLst/>
+          </a:prstGeom>
+          <a:ln w="3600">
+            <a:solidFill>
+              <a:srgbClr val="F7E4FB"/>
+            </a:solidFill>
+          </a:ln>
+        </p:spPr>
+      </p:cxnSp>
+      <p:sp>
+        <p:nvSpPr>
+          <p:cNvPr id="6" name="텍스트"/>
           <p:cNvSpPr txBox="1"/>
           <p:nvPr/>
         </p:nvSpPr>
         <p:spPr>
           <a:xfrm>
-            <a:off x="252000" y="223200"/>
-            <a:ext cx="1440000" cy="133351"/>
+            <a:off x="252000" y="252000"/>
+            <a:ext cx="1440000" cy="123826"/>
           </a:xfrm>
           <a:prstGeom prst="rect">
             <a:avLst/>
@@ -3221,11 +3234,11 @@
           <a:p>
             <a:pPr algn="l">
               <a:lnSpc>
-                <a:spcPts val="1015"/>
+                <a:spcPts val="942"/>
               </a:lnSpc>
             </a:pPr>
             <a:r>
-              <a:rPr sz="700" b="1" spc="200">
+              <a:rPr sz="650" b="1" spc="220">
                 <a:solidFill>
                   <a:srgbClr val="6B7280"/>
                 </a:solidFill>
@@ -3237,16 +3250,37 @@
           </a:p>
         </p:txBody>
       </p:sp>
-      <p:sp>
-        <p:nvSpPr>
-          <p:cNvPr id="5" name="텍스트"/>
+      <p:cxnSp>
+        <p:nvCxnSpPr>
+          <p:cNvPr id="7" name="Connector 6"/>
+          <p:cNvCxnSpPr/>
+          <p:nvPr/>
+        </p:nvCxnSpPr>
+        <p:spPr>
+          <a:xfrm>
+            <a:off x="252000" y="374400"/>
+            <a:ext cx="1260000" cy="0"/>
+          </a:xfrm>
+          <a:prstGeom prst="line">
+            <a:avLst/>
+          </a:prstGeom>
+          <a:ln w="3600">
+            <a:solidFill>
+              <a:srgbClr val="E3E5E9"/>
+            </a:solidFill>
+          </a:ln>
+        </p:spPr>
+      </p:cxnSp>
+      <p:sp>
+        <p:nvSpPr>
+          <p:cNvPr id="8" name="텍스트"/>
           <p:cNvSpPr txBox="1"/>
           <p:nvPr/>
         </p:nvSpPr>
         <p:spPr>
           <a:xfrm>
-            <a:off x="252000" y="540000"/>
-            <a:ext cx="1584000" cy="360000"/>
+            <a:off x="252000" y="633600"/>
+            <a:ext cx="1800000" cy="237600"/>
           </a:xfrm>
           <a:prstGeom prst="rect">
             <a:avLst/>
@@ -3261,11 +3295,11 @@
           <a:p>
             <a:pPr algn="l">
               <a:lnSpc>
-                <a:spcPts val="3190"/>
+                <a:spcPts val="1957"/>
               </a:lnSpc>
             </a:pPr>
             <a:r>
-              <a:rPr sz="2200" b="1">
+              <a:rPr sz="1350" b="1" spc="120">
                 <a:solidFill>
                   <a:srgbClr val="12151C"/>
                 </a:solidFill>
@@ -3279,14 +3313,14 @@
       </p:sp>
       <p:sp>
         <p:nvSpPr>
-          <p:cNvPr id="6" name="텍스트"/>
+          <p:cNvPr id="9" name="텍스트"/>
           <p:cNvSpPr txBox="1"/>
           <p:nvPr/>
         </p:nvSpPr>
         <p:spPr>
           <a:xfrm>
-            <a:off x="252000" y="943200"/>
-            <a:ext cx="1584000" cy="171451"/>
+            <a:off x="252000" y="885600"/>
+            <a:ext cx="1800000" cy="133351"/>
           </a:xfrm>
           <a:prstGeom prst="rect">
             <a:avLst/>
@@ -3301,11 +3335,11 @@
           <a:p>
             <a:pPr algn="l">
               <a:lnSpc>
-                <a:spcPts val="1305"/>
+                <a:spcPts val="1015"/>
               </a:lnSpc>
             </a:pPr>
             <a:r>
-              <a:rPr sz="900" b="0">
+              <a:rPr sz="700" b="0" spc="60">
                 <a:solidFill>
                   <a:srgbClr val="6B7280"/>
                 </a:solidFill>
@@ -3319,14 +3353,14 @@
       </p:sp>
       <p:sp>
         <p:nvSpPr>
-          <p:cNvPr id="7" name="Rectangle 6"/>
+          <p:cNvPr id="10" name="Rectangle 9"/>
           <p:cNvSpPr/>
           <p:nvPr/>
         </p:nvSpPr>
         <p:spPr>
           <a:xfrm>
-            <a:off x="252000" y="1195200"/>
-            <a:ext cx="144000" cy="18000"/>
+            <a:off x="252000" y="1044000"/>
+            <a:ext cx="129600" cy="14400"/>
           </a:xfrm>
           <a:prstGeom prst="rect">
             <a:avLst/>
@@ -3348,14 +3382,14 @@
       </p:sp>
       <p:sp>
         <p:nvSpPr>
-          <p:cNvPr id="8" name="텍스트"/>
+          <p:cNvPr id="11" name="텍스트"/>
           <p:cNvSpPr txBox="1"/>
           <p:nvPr/>
         </p:nvSpPr>
         <p:spPr>
           <a:xfrm>
-            <a:off x="252000" y="1328400"/>
-            <a:ext cx="331200" cy="99061"/>
+            <a:off x="252000" y="1184400"/>
+            <a:ext cx="324000" cy="91441"/>
           </a:xfrm>
           <a:prstGeom prst="rect">
             <a:avLst/>
@@ -3370,11 +3404,11 @@
           <a:p>
             <a:pPr algn="l">
               <a:lnSpc>
-                <a:spcPts val="754"/>
+                <a:spcPts val="696"/>
               </a:lnSpc>
             </a:pPr>
             <a:r>
-              <a:rPr sz="520" b="1" spc="120">
+              <a:rPr sz="480" b="1" spc="140">
                 <a:solidFill>
                   <a:srgbClr val="6B7280"/>
                 </a:solidFill>
@@ -3388,14 +3422,14 @@
       </p:sp>
       <p:sp>
         <p:nvSpPr>
-          <p:cNvPr id="9" name="텍스트"/>
+          <p:cNvPr id="12" name="텍스트"/>
           <p:cNvSpPr txBox="1"/>
           <p:nvPr/>
         </p:nvSpPr>
         <p:spPr>
           <a:xfrm>
-            <a:off x="583200" y="1317600"/>
-            <a:ext cx="1188000" cy="125731"/>
+            <a:off x="576000" y="1173600"/>
+            <a:ext cx="972000" cy="120016"/>
           </a:xfrm>
           <a:prstGeom prst="rect">
             <a:avLst/>
@@ -3410,11 +3444,11 @@
           <a:p>
             <a:pPr algn="l">
               <a:lnSpc>
-                <a:spcPts val="956"/>
+                <a:spcPts val="913"/>
               </a:lnSpc>
             </a:pPr>
             <a:r>
-              <a:rPr sz="660" b="0">
+              <a:rPr sz="630" b="0">
                 <a:solidFill>
                   <a:srgbClr val="12151C"/>
                 </a:solidFill>
@@ -3428,14 +3462,14 @@
       </p:sp>
       <p:sp>
         <p:nvSpPr>
-          <p:cNvPr id="10" name="텍스트"/>
+          <p:cNvPr id="13" name="텍스트"/>
           <p:cNvSpPr txBox="1"/>
           <p:nvPr/>
         </p:nvSpPr>
         <p:spPr>
           <a:xfrm>
-            <a:off x="252000" y="1458000"/>
-            <a:ext cx="331200" cy="99061"/>
+            <a:off x="252000" y="1314000"/>
+            <a:ext cx="324000" cy="91441"/>
           </a:xfrm>
           <a:prstGeom prst="rect">
             <a:avLst/>
@@ -3450,11 +3484,11 @@
           <a:p>
             <a:pPr algn="l">
               <a:lnSpc>
-                <a:spcPts val="754"/>
+                <a:spcPts val="696"/>
               </a:lnSpc>
             </a:pPr>
             <a:r>
-              <a:rPr sz="520" b="1" spc="120">
+              <a:rPr sz="480" b="1" spc="140">
                 <a:solidFill>
                   <a:srgbClr val="6B7280"/>
                 </a:solidFill>
@@ -3468,14 +3502,14 @@
       </p:sp>
       <p:sp>
         <p:nvSpPr>
-          <p:cNvPr id="11" name="텍스트"/>
+          <p:cNvPr id="14" name="텍스트"/>
           <p:cNvSpPr txBox="1"/>
           <p:nvPr/>
         </p:nvSpPr>
         <p:spPr>
           <a:xfrm>
-            <a:off x="583200" y="1447200"/>
-            <a:ext cx="1188000" cy="125731"/>
+            <a:off x="576000" y="1303200"/>
+            <a:ext cx="972000" cy="120016"/>
           </a:xfrm>
           <a:prstGeom prst="rect">
             <a:avLst/>
@@ -3490,11 +3524,11 @@
           <a:p>
             <a:pPr algn="l">
               <a:lnSpc>
-                <a:spcPts val="956"/>
+                <a:spcPts val="913"/>
               </a:lnSpc>
             </a:pPr>
             <a:r>
-              <a:rPr sz="660" b="0">
+              <a:rPr sz="630" b="0">
                 <a:solidFill>
                   <a:srgbClr val="12151C"/>
                 </a:solidFill>
@@ -3508,14 +3542,14 @@
       </p:sp>
       <p:sp>
         <p:nvSpPr>
-          <p:cNvPr id="12" name="텍스트"/>
+          <p:cNvPr id="15" name="텍스트"/>
           <p:cNvSpPr txBox="1"/>
           <p:nvPr/>
         </p:nvSpPr>
         <p:spPr>
           <a:xfrm>
-            <a:off x="252000" y="1587600"/>
-            <a:ext cx="331200" cy="99061"/>
+            <a:off x="252000" y="1443600"/>
+            <a:ext cx="324000" cy="91441"/>
           </a:xfrm>
           <a:prstGeom prst="rect">
             <a:avLst/>
@@ -3530,11 +3564,11 @@
           <a:p>
             <a:pPr algn="l">
               <a:lnSpc>
-                <a:spcPts val="754"/>
+                <a:spcPts val="696"/>
               </a:lnSpc>
             </a:pPr>
             <a:r>
-              <a:rPr sz="520" b="1" spc="120">
+              <a:rPr sz="480" b="1" spc="140">
                 <a:solidFill>
                   <a:srgbClr val="6B7280"/>
                 </a:solidFill>
@@ -3548,14 +3582,14 @@
       </p:sp>
       <p:sp>
         <p:nvSpPr>
-          <p:cNvPr id="13" name="텍스트"/>
+          <p:cNvPr id="16" name="텍스트"/>
           <p:cNvSpPr txBox="1"/>
           <p:nvPr/>
         </p:nvSpPr>
         <p:spPr>
           <a:xfrm>
-            <a:off x="583200" y="1576800"/>
-            <a:ext cx="1188000" cy="125731"/>
+            <a:off x="576000" y="1432800"/>
+            <a:ext cx="972000" cy="120016"/>
           </a:xfrm>
           <a:prstGeom prst="rect">
             <a:avLst/>
@@ -3570,11 +3604,11 @@
           <a:p>
             <a:pPr algn="l">
               <a:lnSpc>
-                <a:spcPts val="956"/>
+                <a:spcPts val="913"/>
               </a:lnSpc>
             </a:pPr>
             <a:r>
-              <a:rPr sz="660" b="0">
+              <a:rPr sz="630" b="0">
                 <a:solidFill>
                   <a:srgbClr val="12151C"/>
                 </a:solidFill>
@@ -3620,8 +3654,8 @@
         </p:nvSpPr>
         <p:spPr>
           <a:xfrm>
-            <a:off x="252000" y="324000"/>
-            <a:ext cx="2520000" cy="792000"/>
+            <a:off x="252000" y="252000"/>
+            <a:ext cx="1080000" cy="99061"/>
           </a:xfrm>
           <a:prstGeom prst="rect">
             <a:avLst/>
@@ -3636,18 +3670,18 @@
           <a:p>
             <a:pPr algn="l">
               <a:lnSpc>
-                <a:spcPts val="1884"/>
+                <a:spcPts val="754"/>
               </a:lnSpc>
             </a:pPr>
             <a:r>
-              <a:rPr sz="1300" b="1">
+              <a:rPr sz="520" b="1" spc="240">
                 <a:solidFill>
-                  <a:srgbClr val="FFFFFF"/>
+                  <a:srgbClr val="A3A9B5"/>
                 </a:solidFill>
                 <a:latin typeface="맑은 고딕"/>
                 <a:ea typeface="맑은 고딕"/>
               </a:rPr>
-              <a:t>병원 문턱을 낮추겠습니다</a:t>
+              <a:t>진료 · 상담</a:t>
             </a:r>
           </a:p>
         </p:txBody>
@@ -3660,8 +3694,8 @@
         </p:nvSpPr>
         <p:spPr>
           <a:xfrm>
-            <a:off x="0" y="1476000"/>
-            <a:ext cx="3240000" cy="324000"/>
+            <a:off x="252000" y="352800"/>
+            <a:ext cx="108000" cy="14400"/>
           </a:xfrm>
           <a:prstGeom prst="rect">
             <a:avLst/>
@@ -3681,16 +3715,37 @@
           </a:p>
         </p:txBody>
       </p:sp>
-      <p:sp>
-        <p:nvSpPr>
-          <p:cNvPr id="4" name="텍스트"/>
+      <p:cxnSp>
+        <p:nvCxnSpPr>
+          <p:cNvPr id="4" name="Connector 3"/>
+          <p:cNvCxnSpPr/>
+          <p:nvPr/>
+        </p:nvCxnSpPr>
+        <p:spPr>
+          <a:xfrm>
+            <a:off x="252000" y="468000"/>
+            <a:ext cx="1512000" cy="0"/>
+          </a:xfrm>
+          <a:prstGeom prst="line">
+            <a:avLst/>
+          </a:prstGeom>
+          <a:ln w="3600">
+            <a:solidFill>
+              <a:srgbClr val="2A2F38"/>
+            </a:solidFill>
+          </a:ln>
+        </p:spPr>
+      </p:cxnSp>
+      <p:sp>
+        <p:nvSpPr>
+          <p:cNvPr id="5" name="텍스트"/>
           <p:cNvSpPr txBox="1"/>
           <p:nvPr/>
         </p:nvSpPr>
         <p:spPr>
           <a:xfrm>
-            <a:off x="252000" y="1569600"/>
-            <a:ext cx="1872000" cy="142876"/>
+            <a:off x="252000" y="511200"/>
+            <a:ext cx="1260000" cy="133351"/>
           </a:xfrm>
           <a:prstGeom prst="rect">
             <a:avLst/>
@@ -3705,41 +3760,246 @@
           <a:p>
             <a:pPr algn="l">
               <a:lnSpc>
-                <a:spcPts val="1087"/>
+                <a:spcPts val="1015"/>
               </a:lnSpc>
             </a:pPr>
             <a:r>
-              <a:rPr sz="750" b="1" spc="200">
+              <a:rPr sz="700" b="0">
                 <a:solidFill>
                   <a:srgbClr val="FFFFFF"/>
                 </a:solidFill>
                 <a:latin typeface="맑은 고딕"/>
                 <a:ea typeface="맑은 고딕"/>
               </a:rPr>
-              <a:t>의원 · 약국 이름</a:t>
-            </a:r>
-          </a:p>
-        </p:txBody>
-      </p:sp>
-      <p:sp>
-        <p:nvSpPr>
-          <p:cNvPr id="5" name="Oval 4"/>
+              <a:t>건강 검진</a:t>
+            </a:r>
+          </a:p>
+        </p:txBody>
+      </p:sp>
+      <p:cxnSp>
+        <p:nvCxnSpPr>
+          <p:cNvPr id="6" name="Connector 5"/>
+          <p:cNvCxnSpPr/>
+          <p:nvPr/>
+        </p:nvCxnSpPr>
+        <p:spPr>
+          <a:xfrm>
+            <a:off x="252000" y="655200"/>
+            <a:ext cx="1512000" cy="0"/>
+          </a:xfrm>
+          <a:prstGeom prst="line">
+            <a:avLst/>
+          </a:prstGeom>
+          <a:ln w="3600">
+            <a:solidFill>
+              <a:srgbClr val="2A2F38"/>
+            </a:solidFill>
+          </a:ln>
+        </p:spPr>
+      </p:cxnSp>
+      <p:sp>
+        <p:nvSpPr>
+          <p:cNvPr id="7" name="텍스트"/>
+          <p:cNvSpPr txBox="1"/>
+          <p:nvPr/>
+        </p:nvSpPr>
+        <p:spPr>
+          <a:xfrm>
+            <a:off x="252000" y="698400"/>
+            <a:ext cx="1260000" cy="133351"/>
+          </a:xfrm>
+          <a:prstGeom prst="rect">
+            <a:avLst/>
+          </a:prstGeom>
+          <a:noFill/>
+        </p:spPr>
+        <p:txBody>
+          <a:bodyPr wrap="square" lIns="0" rIns="0" tIns="0" bIns="0" anchor="t">
+            <a:spAutoFit/>
+          </a:bodyPr>
+          <a:lstStyle/>
+          <a:p>
+            <a:pPr algn="l">
+              <a:lnSpc>
+                <a:spcPts val="1015"/>
+              </a:lnSpc>
+            </a:pPr>
+            <a:r>
+              <a:rPr sz="700" b="0">
+                <a:solidFill>
+                  <a:srgbClr val="FFFFFF"/>
+                </a:solidFill>
+                <a:latin typeface="맑은 고딕"/>
+                <a:ea typeface="맑은 고딕"/>
+              </a:rPr>
+              <a:t>복약 상담</a:t>
+            </a:r>
+          </a:p>
+        </p:txBody>
+      </p:sp>
+      <p:cxnSp>
+        <p:nvCxnSpPr>
+          <p:cNvPr id="8" name="Connector 7"/>
+          <p:cNvCxnSpPr/>
+          <p:nvPr/>
+        </p:nvCxnSpPr>
+        <p:spPr>
+          <a:xfrm>
+            <a:off x="252000" y="842400"/>
+            <a:ext cx="1512000" cy="0"/>
+          </a:xfrm>
+          <a:prstGeom prst="line">
+            <a:avLst/>
+          </a:prstGeom>
+          <a:ln w="3600">
+            <a:solidFill>
+              <a:srgbClr val="2A2F38"/>
+            </a:solidFill>
+          </a:ln>
+        </p:spPr>
+      </p:cxnSp>
+      <p:sp>
+        <p:nvSpPr>
+          <p:cNvPr id="9" name="텍스트"/>
+          <p:cNvSpPr txBox="1"/>
+          <p:nvPr/>
+        </p:nvSpPr>
+        <p:spPr>
+          <a:xfrm>
+            <a:off x="252000" y="885600"/>
+            <a:ext cx="1260000" cy="133351"/>
+          </a:xfrm>
+          <a:prstGeom prst="rect">
+            <a:avLst/>
+          </a:prstGeom>
+          <a:noFill/>
+        </p:spPr>
+        <p:txBody>
+          <a:bodyPr wrap="square" lIns="0" rIns="0" tIns="0" bIns="0" anchor="t">
+            <a:spAutoFit/>
+          </a:bodyPr>
+          <a:lstStyle/>
+          <a:p>
+            <a:pPr algn="l">
+              <a:lnSpc>
+                <a:spcPts val="1015"/>
+              </a:lnSpc>
+            </a:pPr>
+            <a:r>
+              <a:rPr sz="700" b="0">
+                <a:solidFill>
+                  <a:srgbClr val="FFFFFF"/>
+                </a:solidFill>
+                <a:latin typeface="맑은 고딕"/>
+                <a:ea typeface="맑은 고딕"/>
+              </a:rPr>
+              <a:t>치아 관리</a:t>
+            </a:r>
+          </a:p>
+        </p:txBody>
+      </p:sp>
+      <p:cxnSp>
+        <p:nvCxnSpPr>
+          <p:cNvPr id="10" name="Connector 9"/>
+          <p:cNvCxnSpPr/>
+          <p:nvPr/>
+        </p:nvCxnSpPr>
+        <p:spPr>
+          <a:xfrm>
+            <a:off x="252000" y="1029600"/>
+            <a:ext cx="1512000" cy="0"/>
+          </a:xfrm>
+          <a:prstGeom prst="line">
+            <a:avLst/>
+          </a:prstGeom>
+          <a:ln w="3600">
+            <a:solidFill>
+              <a:srgbClr val="2A2F38"/>
+            </a:solidFill>
+          </a:ln>
+        </p:spPr>
+      </p:cxnSp>
+      <p:sp>
+        <p:nvSpPr>
+          <p:cNvPr id="11" name="텍스트"/>
+          <p:cNvSpPr txBox="1"/>
+          <p:nvPr/>
+        </p:nvSpPr>
+        <p:spPr>
+          <a:xfrm>
+            <a:off x="252000" y="1072800"/>
+            <a:ext cx="1260000" cy="133351"/>
+          </a:xfrm>
+          <a:prstGeom prst="rect">
+            <a:avLst/>
+          </a:prstGeom>
+          <a:noFill/>
+        </p:spPr>
+        <p:txBody>
+          <a:bodyPr wrap="square" lIns="0" rIns="0" tIns="0" bIns="0" anchor="t">
+            <a:spAutoFit/>
+          </a:bodyPr>
+          <a:lstStyle/>
+          <a:p>
+            <a:pPr algn="l">
+              <a:lnSpc>
+                <a:spcPts val="1015"/>
+              </a:lnSpc>
+            </a:pPr>
+            <a:r>
+              <a:rPr sz="700" b="0">
+                <a:solidFill>
+                  <a:srgbClr val="FFFFFF"/>
+                </a:solidFill>
+                <a:latin typeface="맑은 고딕"/>
+                <a:ea typeface="맑은 고딕"/>
+              </a:rPr>
+              <a:t>예약 문의</a:t>
+            </a:r>
+          </a:p>
+        </p:txBody>
+      </p:sp>
+      <p:cxnSp>
+        <p:nvCxnSpPr>
+          <p:cNvPr id="12" name="Connector 11"/>
+          <p:cNvCxnSpPr/>
+          <p:nvPr/>
+        </p:nvCxnSpPr>
+        <p:spPr>
+          <a:xfrm>
+            <a:off x="252000" y="1216800"/>
+            <a:ext cx="1512000" cy="0"/>
+          </a:xfrm>
+          <a:prstGeom prst="line">
+            <a:avLst/>
+          </a:prstGeom>
+          <a:ln w="3600">
+            <a:solidFill>
+              <a:srgbClr val="2A2F38"/>
+            </a:solidFill>
+          </a:ln>
+        </p:spPr>
+      </p:cxnSp>
+      <p:sp>
+        <p:nvSpPr>
+          <p:cNvPr id="13" name="Rectangle 12"/>
           <p:cNvSpPr/>
           <p:nvPr/>
         </p:nvSpPr>
         <p:spPr>
           <a:xfrm>
-            <a:off x="2714400" y="1616400"/>
-            <a:ext cx="43200" cy="43200"/>
-          </a:xfrm>
-          <a:prstGeom prst="ellipse">
+            <a:off x="2196000" y="396000"/>
+            <a:ext cx="720000" cy="720000"/>
+          </a:xfrm>
+          <a:prstGeom prst="rect">
             <a:avLst/>
           </a:prstGeom>
-          <a:solidFill>
-            <a:srgbClr val="FFFFFF"/>
-          </a:solidFill>
-          <a:ln>
-            <a:noFill/>
+          <a:noFill/>
+          <a:ln w="4320">
+            <a:solidFill>
+              <a:srgbClr val="A3A9B5"/>
+            </a:solidFill>
+            <a:prstDash val="dash"/>
           </a:ln>
         </p:spPr>
         <p:txBody>
@@ -3752,63 +4012,121 @@
       </p:sp>
       <p:sp>
         <p:nvSpPr>
-          <p:cNvPr id="6" name="Oval 5"/>
-          <p:cNvSpPr/>
+          <p:cNvPr id="14" name="텍스트"/>
+          <p:cNvSpPr txBox="1"/>
           <p:nvPr/>
         </p:nvSpPr>
         <p:spPr>
           <a:xfrm>
-            <a:off x="2822400" y="1616400"/>
-            <a:ext cx="43200" cy="43200"/>
-          </a:xfrm>
-          <a:prstGeom prst="ellipse">
+            <a:off x="2196000" y="396000"/>
+            <a:ext cx="720000" cy="720000"/>
+          </a:xfrm>
+          <a:prstGeom prst="rect">
             <a:avLst/>
           </a:prstGeom>
-          <a:solidFill>
-            <a:srgbClr val="FFFFFF">
-              <a:alpha val="50000"/>
-            </a:srgbClr>
-          </a:solidFill>
-          <a:ln>
-            <a:noFill/>
-          </a:ln>
-        </p:spPr>
-        <p:txBody>
-          <a:bodyPr rtlCol="0" anchor="ctr"/>
-          <a:lstStyle/>
-          <a:p>
-            <a:pPr algn="ctr"/>
-          </a:p>
-        </p:txBody>
-      </p:sp>
-      <p:sp>
-        <p:nvSpPr>
-          <p:cNvPr id="7" name="Oval 6"/>
-          <p:cNvSpPr/>
+          <a:noFill/>
+        </p:spPr>
+        <p:txBody>
+          <a:bodyPr wrap="square" lIns="0" rIns="0" tIns="0" bIns="0" anchor="ctr">
+            <a:spAutoFit/>
+          </a:bodyPr>
+          <a:lstStyle/>
+          <a:p>
+            <a:pPr algn="ctr">
+              <a:lnSpc>
+                <a:spcPts val="1305"/>
+              </a:lnSpc>
+            </a:pPr>
+            <a:r>
+              <a:rPr sz="900" b="1">
+                <a:solidFill>
+                  <a:srgbClr val="A3A9B5"/>
+                </a:solidFill>
+                <a:latin typeface="맑은 고딕"/>
+                <a:ea typeface="맑은 고딕"/>
+              </a:rPr>
+              <a:t>QR</a:t>
+            </a:r>
+          </a:p>
+        </p:txBody>
+      </p:sp>
+      <p:sp>
+        <p:nvSpPr>
+          <p:cNvPr id="15" name="텍스트"/>
+          <p:cNvSpPr txBox="1"/>
           <p:nvPr/>
         </p:nvSpPr>
         <p:spPr>
           <a:xfrm>
-            <a:off x="2930400" y="1616400"/>
-            <a:ext cx="43200" cy="43200"/>
-          </a:xfrm>
-          <a:prstGeom prst="ellipse">
+            <a:off x="2196000" y="1209600"/>
+            <a:ext cx="720000" cy="118111"/>
+          </a:xfrm>
+          <a:prstGeom prst="rect">
             <a:avLst/>
           </a:prstGeom>
-          <a:solidFill>
-            <a:srgbClr val="FFFFFF">
-              <a:alpha val="50000"/>
-            </a:srgbClr>
-          </a:solidFill>
-          <a:ln>
-            <a:noFill/>
-          </a:ln>
-        </p:spPr>
-        <p:txBody>
-          <a:bodyPr rtlCol="0" anchor="ctr"/>
-          <a:lstStyle/>
-          <a:p>
-            <a:pPr algn="ctr"/>
+          <a:noFill/>
+        </p:spPr>
+        <p:txBody>
+          <a:bodyPr wrap="square" lIns="0" rIns="0" tIns="0" bIns="0" anchor="t">
+            <a:spAutoFit/>
+          </a:bodyPr>
+          <a:lstStyle/>
+          <a:p>
+            <a:pPr algn="ctr">
+              <a:lnSpc>
+                <a:spcPts val="899"/>
+              </a:lnSpc>
+            </a:pPr>
+            <a:r>
+              <a:rPr sz="620" b="0">
+                <a:solidFill>
+                  <a:srgbClr val="FFFFFF"/>
+                </a:solidFill>
+                <a:latin typeface="맑은 고딕"/>
+                <a:ea typeface="맑은 고딕"/>
+              </a:rPr>
+              <a:t>@아이디</a:t>
+            </a:r>
+          </a:p>
+        </p:txBody>
+      </p:sp>
+      <p:sp>
+        <p:nvSpPr>
+          <p:cNvPr id="16" name="텍스트"/>
+          <p:cNvSpPr txBox="1"/>
+          <p:nvPr/>
+        </p:nvSpPr>
+        <p:spPr>
+          <a:xfrm>
+            <a:off x="2196000" y="1353600"/>
+            <a:ext cx="720000" cy="118111"/>
+          </a:xfrm>
+          <a:prstGeom prst="rect">
+            <a:avLst/>
+          </a:prstGeom>
+          <a:noFill/>
+        </p:spPr>
+        <p:txBody>
+          <a:bodyPr wrap="square" lIns="0" rIns="0" tIns="0" bIns="0" anchor="t">
+            <a:spAutoFit/>
+          </a:bodyPr>
+          <a:lstStyle/>
+          <a:p>
+            <a:pPr algn="ctr">
+              <a:lnSpc>
+                <a:spcPts val="899"/>
+              </a:lnSpc>
+            </a:pPr>
+            <a:r>
+              <a:rPr sz="620" b="0">
+                <a:solidFill>
+                  <a:srgbClr val="A3A9B5"/>
+                </a:solidFill>
+                <a:latin typeface="맑은 고딕"/>
+                <a:ea typeface="맑은 고딕"/>
+              </a:rPr>
+              <a:t>월–금 09:30 – 18:30</a:t>
+            </a:r>
           </a:p>
         </p:txBody>
       </p:sp>
